--- a/課程簡介.pptx
+++ b/課程簡介.pptx
@@ -141,7 +141,7 @@
       </p14:sectionLst>
     </p:ext>
     <p:ext uri="{EFAFB233-063F-42B5-8137-9DF3F51BA10A}">
-      <p15:sldGuideLst xmlns:p15="http://schemas.microsoft.com/office/powerpoint/2012/main">
+      <p15:sldGuideLst xmlns:p15="http://schemas.microsoft.com/office/powerpoint/2012/main" xmlns="">
         <p15:guide id="1" orient="horz" pos="2160">
           <p15:clr>
             <a:srgbClr val="A4A3A4"/>
@@ -155,7 +155,7 @@
       </p15:sldGuideLst>
     </p:ext>
     <p:ext uri="{2D200454-40CA-4A62-9FC3-DE9A4176ACB9}">
-      <p15:notesGuideLst xmlns:p15="http://schemas.microsoft.com/office/powerpoint/2012/main">
+      <p15:notesGuideLst xmlns:p15="http://schemas.microsoft.com/office/powerpoint/2012/main" xmlns="">
         <p15:guide id="1" orient="horz" pos="3130">
           <p15:clr>
             <a:srgbClr val="A4A3A4"/>
@@ -1315,6 +1315,13 @@
         </dgm:presLayoutVars>
       </dgm:prSet>
       <dgm:spPr/>
+      <dgm:t>
+        <a:bodyPr/>
+        <a:lstStyle/>
+        <a:p>
+          <a:endParaRPr lang="zh-TW" altLang="en-US"/>
+        </a:p>
+      </dgm:t>
     </dgm:pt>
     <dgm:pt modelId="{3E2A2290-36BE-4B58-819C-D70E7140EAD7}" type="pres">
       <dgm:prSet presAssocID="{084380AE-B93B-46C6-8A5E-FBFC1BCD6AFD}" presName="bullet3b" presStyleLbl="node1" presStyleIdx="1" presStyleCnt="3"/>
@@ -1327,6 +1334,13 @@
         </dgm:presLayoutVars>
       </dgm:prSet>
       <dgm:spPr/>
+      <dgm:t>
+        <a:bodyPr/>
+        <a:lstStyle/>
+        <a:p>
+          <a:endParaRPr lang="zh-TW" altLang="en-US"/>
+        </a:p>
+      </dgm:t>
     </dgm:pt>
     <dgm:pt modelId="{2A08EA08-D751-4518-B991-6EE6A2A8FC73}" type="pres">
       <dgm:prSet presAssocID="{4ADCAA2B-7BDE-4A13-BF08-2278713D185D}" presName="bullet3c" presStyleLbl="node1" presStyleIdx="2" presStyleCnt="3"/>
@@ -1339,16 +1353,23 @@
         </dgm:presLayoutVars>
       </dgm:prSet>
       <dgm:spPr/>
+      <dgm:t>
+        <a:bodyPr/>
+        <a:lstStyle/>
+        <a:p>
+          <a:endParaRPr lang="zh-TW" altLang="en-US"/>
+        </a:p>
+      </dgm:t>
     </dgm:pt>
   </dgm:ptLst>
   <dgm:cxnLst>
-    <dgm:cxn modelId="{96F0E000-4793-4B7C-B956-E15E60A97E61}" type="presOf" srcId="{B0526D60-9C9B-46A5-A6E3-BBB73485C5D6}" destId="{FA327882-55BC-4C03-B9C6-76035334F7F4}" srcOrd="0" destOrd="0" presId="urn:microsoft.com/office/officeart/2005/8/layout/arrow2"/>
-    <dgm:cxn modelId="{B6381562-D36B-4E16-8AE7-B314159C7C4C}" srcId="{55A22000-4681-40C7-8E25-D353E8ABFDC3}" destId="{4ADCAA2B-7BDE-4A13-BF08-2278713D185D}" srcOrd="2" destOrd="0" parTransId="{1ED7F0F0-B40F-4385-9E37-BCB71781E360}" sibTransId="{199A85F9-5680-4076-9980-27AA454FE283}"/>
-    <dgm:cxn modelId="{25B5488C-FEBC-4598-80CA-F0F52D3B9A50}" type="presOf" srcId="{55A22000-4681-40C7-8E25-D353E8ABFDC3}" destId="{883A80C8-B8DF-4D94-9C6D-54A8365460D4}" srcOrd="0" destOrd="0" presId="urn:microsoft.com/office/officeart/2005/8/layout/arrow2"/>
     <dgm:cxn modelId="{756BF2AB-5B6F-4835-8651-60C51AFFEDE5}" srcId="{55A22000-4681-40C7-8E25-D353E8ABFDC3}" destId="{B0526D60-9C9B-46A5-A6E3-BBB73485C5D6}" srcOrd="0" destOrd="0" parTransId="{C7DFB8C7-A47C-499C-80C0-754BDF4F0B56}" sibTransId="{2DC2144D-0B1D-4043-AFA3-64C0C42B02EF}"/>
-    <dgm:cxn modelId="{BC4CFDB3-64BA-4D6D-BD48-B6092E5E887F}" type="presOf" srcId="{084380AE-B93B-46C6-8A5E-FBFC1BCD6AFD}" destId="{9AB51EB8-2C28-4769-BDFE-E375DD00C872}" srcOrd="0" destOrd="0" presId="urn:microsoft.com/office/officeart/2005/8/layout/arrow2"/>
     <dgm:cxn modelId="{A68E26C9-86D6-4C57-ABB9-62E465E21CD5}" type="presOf" srcId="{4ADCAA2B-7BDE-4A13-BF08-2278713D185D}" destId="{DD008432-C651-433D-B662-07ADCC0CFEC2}" srcOrd="0" destOrd="0" presId="urn:microsoft.com/office/officeart/2005/8/layout/arrow2"/>
     <dgm:cxn modelId="{843B75DE-9DB2-478C-8007-8F67F4563B7C}" srcId="{55A22000-4681-40C7-8E25-D353E8ABFDC3}" destId="{084380AE-B93B-46C6-8A5E-FBFC1BCD6AFD}" srcOrd="1" destOrd="0" parTransId="{D6A78E25-FDCF-4ADD-92C1-3BA2165B597D}" sibTransId="{C6E5DD89-D67B-4908-AB95-6D56DAC9D2F5}"/>
+    <dgm:cxn modelId="{B6381562-D36B-4E16-8AE7-B314159C7C4C}" srcId="{55A22000-4681-40C7-8E25-D353E8ABFDC3}" destId="{4ADCAA2B-7BDE-4A13-BF08-2278713D185D}" srcOrd="2" destOrd="0" parTransId="{1ED7F0F0-B40F-4385-9E37-BCB71781E360}" sibTransId="{199A85F9-5680-4076-9980-27AA454FE283}"/>
+    <dgm:cxn modelId="{96F0E000-4793-4B7C-B956-E15E60A97E61}" type="presOf" srcId="{B0526D60-9C9B-46A5-A6E3-BBB73485C5D6}" destId="{FA327882-55BC-4C03-B9C6-76035334F7F4}" srcOrd="0" destOrd="0" presId="urn:microsoft.com/office/officeart/2005/8/layout/arrow2"/>
+    <dgm:cxn modelId="{BC4CFDB3-64BA-4D6D-BD48-B6092E5E887F}" type="presOf" srcId="{084380AE-B93B-46C6-8A5E-FBFC1BCD6AFD}" destId="{9AB51EB8-2C28-4769-BDFE-E375DD00C872}" srcOrd="0" destOrd="0" presId="urn:microsoft.com/office/officeart/2005/8/layout/arrow2"/>
+    <dgm:cxn modelId="{25B5488C-FEBC-4598-80CA-F0F52D3B9A50}" type="presOf" srcId="{55A22000-4681-40C7-8E25-D353E8ABFDC3}" destId="{883A80C8-B8DF-4D94-9C6D-54A8365460D4}" srcOrd="0" destOrd="0" presId="urn:microsoft.com/office/officeart/2005/8/layout/arrow2"/>
     <dgm:cxn modelId="{124D34C4-9329-4DCC-A80C-B37E64D60498}" type="presParOf" srcId="{883A80C8-B8DF-4D94-9C6D-54A8365460D4}" destId="{85F6C52A-85C9-44AF-BB86-4026024961F5}" srcOrd="0" destOrd="0" presId="urn:microsoft.com/office/officeart/2005/8/layout/arrow2"/>
     <dgm:cxn modelId="{07BDDC95-08E4-40F7-8708-4FD4B6817E94}" type="presParOf" srcId="{883A80C8-B8DF-4D94-9C6D-54A8365460D4}" destId="{AF6756CC-42C7-4D50-BF3F-7CC55E55F0C7}" srcOrd="1" destOrd="0" presId="urn:microsoft.com/office/officeart/2005/8/layout/arrow2"/>
     <dgm:cxn modelId="{1560A715-0228-45E1-8264-07C09A7BD570}" type="presParOf" srcId="{AF6756CC-42C7-4D50-BF3F-7CC55E55F0C7}" destId="{64812938-AC4D-4BBE-93AD-6B44E99CA9DC}" srcOrd="0" destOrd="0" presId="urn:microsoft.com/office/officeart/2005/8/layout/arrow2"/>
@@ -1574,7 +1595,7 @@
         </a:bodyPr>
         <a:lstStyle/>
         <a:p>
-          <a:pPr marL="0" lvl="0" indent="0" algn="l" defTabSz="1244600">
+          <a:pPr lvl="0" algn="l" defTabSz="1244600">
             <a:lnSpc>
               <a:spcPts val="3800"/>
             </a:lnSpc>
@@ -1584,7 +1605,6 @@
             <a:spcAft>
               <a:spcPts val="0"/>
             </a:spcAft>
-            <a:buNone/>
           </a:pPr>
           <a:r>
             <a:rPr lang="zh-TW" altLang="en-US" sz="2800" kern="1200" dirty="0">
@@ -1599,7 +1619,7 @@
           </a:endParaRPr>
         </a:p>
         <a:p>
-          <a:pPr marL="0" lvl="0" indent="0" algn="l" defTabSz="1244600">
+          <a:pPr lvl="0" algn="l" defTabSz="1244600">
             <a:lnSpc>
               <a:spcPts val="3800"/>
             </a:lnSpc>
@@ -1609,7 +1629,6 @@
             <a:spcAft>
               <a:spcPts val="0"/>
             </a:spcAft>
-            <a:buNone/>
           </a:pPr>
           <a:r>
             <a:rPr lang="zh-TW" altLang="en-US" sz="2800" kern="1200" dirty="0">
@@ -1748,7 +1767,7 @@
         </a:bodyPr>
         <a:lstStyle/>
         <a:p>
-          <a:pPr marL="0" lvl="0" indent="0" algn="l" defTabSz="1244600">
+          <a:pPr lvl="0" algn="l" defTabSz="1244600">
             <a:lnSpc>
               <a:spcPts val="3800"/>
             </a:lnSpc>
@@ -1758,7 +1777,6 @@
             <a:spcAft>
               <a:spcPts val="0"/>
             </a:spcAft>
-            <a:buNone/>
           </a:pPr>
           <a:r>
             <a:rPr lang="zh-TW" altLang="en-US" sz="2800" kern="1200" dirty="0">
@@ -1773,7 +1791,7 @@
           </a:endParaRPr>
         </a:p>
         <a:p>
-          <a:pPr marL="0" lvl="0" indent="0" algn="l" defTabSz="1244600">
+          <a:pPr lvl="0" algn="l" defTabSz="1244600">
             <a:lnSpc>
               <a:spcPts val="3800"/>
             </a:lnSpc>
@@ -1783,7 +1801,6 @@
             <a:spcAft>
               <a:spcPts val="0"/>
             </a:spcAft>
-            <a:buNone/>
           </a:pPr>
           <a:endParaRPr lang="zh-CN" altLang="en-US" sz="2800" kern="1200" dirty="0">
             <a:latin typeface="微軟正黑體" panose="020B0604030504040204" pitchFamily="34" charset="-120"/>
@@ -1915,7 +1932,7 @@
         </a:bodyPr>
         <a:lstStyle/>
         <a:p>
-          <a:pPr marL="0" lvl="0" indent="0" algn="l" defTabSz="1244600">
+          <a:pPr lvl="0" algn="l" defTabSz="1244600">
             <a:lnSpc>
               <a:spcPts val="3500"/>
             </a:lnSpc>
@@ -1925,7 +1942,6 @@
             <a:spcAft>
               <a:spcPts val="0"/>
             </a:spcAft>
-            <a:buNone/>
           </a:pPr>
           <a:r>
             <a:rPr lang="zh-TW" altLang="en-US" sz="2800" kern="1200" dirty="0">
@@ -4793,7 +4809,7 @@
           <a:p>
             <a:fld id="{C55A9855-3F96-4576-AAE2-F318826004DF}" type="datetimeFigureOut">
               <a:rPr lang="zh-TW" altLang="en-US" smtClean="0"/>
-              <a:t>2026/9/5</a:t>
+              <a:t>2026/9/14</a:t>
             </a:fld>
             <a:endParaRPr lang="zh-TW" altLang="en-US"/>
           </a:p>
@@ -4959,7 +4975,7 @@
             <a:fld id="{B38FD96E-D0D4-4DF9-AEB8-F08767C1DA62}" type="datetimeFigureOut">
               <a:rPr lang="zh-TW" altLang="en-US" smtClean="0"/>
               <a:pPr/>
-              <a:t>2026/9/5</a:t>
+              <a:t>2026/9/14</a:t>
             </a:fld>
             <a:endParaRPr lang="zh-TW" altLang="en-US"/>
           </a:p>
@@ -5848,7 +5864,7 @@
           <p:cNvPr id="6" name="圖片 5" descr="一張含有 燈泡 的圖片&#10;&#10;AI 產生的內容可能不正確。">
             <a:extLst>
               <a:ext uri="{FF2B5EF4-FFF2-40B4-BE49-F238E27FC236}">
-                <a16:creationId xmlns:a16="http://schemas.microsoft.com/office/drawing/2014/main" id="{95745729-B72A-8FEF-792C-146789B7B240}"/>
+                <a16:creationId xmlns:a16="http://schemas.microsoft.com/office/drawing/2014/main" xmlns="" id="{95745729-B72A-8FEF-792C-146789B7B240}"/>
               </a:ext>
             </a:extLst>
           </p:cNvPr>
@@ -5926,7 +5942,7 @@
           <a:p>
             <a:fld id="{BADC52D3-C2E9-4EF2-BBD8-579438826593}" type="datetime1">
               <a:rPr lang="zh-TW" altLang="en-US" smtClean="0"/>
-              <a:t>2026/9/5</a:t>
+              <a:t>2026/9/14</a:t>
             </a:fld>
             <a:endParaRPr lang="zh-TW" altLang="en-US"/>
           </a:p>
@@ -6204,7 +6220,7 @@
           <a:p>
             <a:fld id="{EA0436D3-B797-47F4-8EC2-0E56D2529CFD}" type="datetime1">
               <a:rPr lang="zh-TW" altLang="en-US" smtClean="0"/>
-              <a:t>2026/9/5</a:t>
+              <a:t>2026/9/14</a:t>
             </a:fld>
             <a:endParaRPr lang="zh-TW" altLang="en-US"/>
           </a:p>
@@ -6462,7 +6478,7 @@
           <a:p>
             <a:fld id="{A268FDBD-9D1D-4D8B-9FE7-57ED3383D391}" type="datetime1">
               <a:rPr lang="zh-TW" altLang="en-US" smtClean="0"/>
-              <a:t>2026/9/5</a:t>
+              <a:t>2026/9/14</a:t>
             </a:fld>
             <a:endParaRPr lang="zh-TW" altLang="en-US"/>
           </a:p>
@@ -6638,7 +6654,7 @@
           <a:p>
             <a:fld id="{A93103C8-556C-4CF7-B50B-277ADBFCA120}" type="datetime1">
               <a:rPr lang="zh-TW" altLang="en-US" smtClean="0"/>
-              <a:t>2026/9/5</a:t>
+              <a:t>2026/9/14</a:t>
             </a:fld>
             <a:endParaRPr lang="zh-TW" altLang="en-US"/>
           </a:p>
@@ -6819,7 +6835,7 @@
           <a:p>
             <a:fld id="{A42DC106-07EF-4E7F-90CC-4204CDD1BCD8}" type="datetime1">
               <a:rPr lang="zh-TW" altLang="en-US" smtClean="0"/>
-              <a:t>2026/9/5</a:t>
+              <a:t>2026/9/14</a:t>
             </a:fld>
             <a:endParaRPr lang="zh-TW" altLang="en-US"/>
           </a:p>
@@ -6944,7 +6960,7 @@
           <a:p>
             <a:fld id="{2D6831F2-BDED-4AEB-AE33-006F9ECCA2C8}" type="datetime1">
               <a:rPr lang="zh-TW" altLang="en-US" smtClean="0"/>
-              <a:t>2026/9/5</a:t>
+              <a:t>2026/9/14</a:t>
             </a:fld>
             <a:endParaRPr lang="zh-TW" altLang="en-US"/>
           </a:p>
@@ -7070,7 +7086,7 @@
           <a:p>
             <a:fld id="{42C442D8-9C80-47F7-991A-AE2212DADCA5}" type="datetime1">
               <a:rPr lang="zh-TW" altLang="en-US" smtClean="0"/>
-              <a:t>2026/9/5</a:t>
+              <a:t>2026/9/14</a:t>
             </a:fld>
             <a:endParaRPr lang="zh-TW" altLang="en-US"/>
           </a:p>
@@ -7318,7 +7334,7 @@
           <a:p>
             <a:fld id="{D974B04D-3439-4155-A703-E234727B63F5}" type="datetime1">
               <a:rPr lang="zh-TW" altLang="en-US" smtClean="0"/>
-              <a:t>2026/9/5</a:t>
+              <a:t>2026/9/14</a:t>
             </a:fld>
             <a:endParaRPr lang="zh-TW" altLang="en-US"/>
           </a:p>
@@ -7553,7 +7569,7 @@
           <a:p>
             <a:fld id="{716E6385-44E4-4C40-81A0-E5CA0A057240}" type="datetime1">
               <a:rPr lang="zh-TW" altLang="en-US" smtClean="0"/>
-              <a:t>2026/9/5</a:t>
+              <a:t>2026/9/14</a:t>
             </a:fld>
             <a:endParaRPr lang="zh-TW" altLang="en-US"/>
           </a:p>
@@ -7788,7 +7804,7 @@
           <a:p>
             <a:fld id="{716E6385-44E4-4C40-81A0-E5CA0A057240}" type="datetime1">
               <a:rPr lang="zh-TW" altLang="en-US" smtClean="0"/>
-              <a:t>2026/9/5</a:t>
+              <a:t>2026/9/14</a:t>
             </a:fld>
             <a:endParaRPr lang="zh-TW" altLang="en-US"/>
           </a:p>
@@ -8036,7 +8052,7 @@
           <a:p>
             <a:fld id="{BF7B9A50-0BC0-438D-A316-B9E866D145E2}" type="datetime1">
               <a:rPr lang="zh-TW" altLang="en-US" smtClean="0"/>
-              <a:t>2026/9/5</a:t>
+              <a:t>2026/9/14</a:t>
             </a:fld>
             <a:endParaRPr lang="zh-TW" altLang="en-US"/>
           </a:p>
@@ -8329,7 +8345,7 @@
           <a:p>
             <a:fld id="{53BA2EFE-9673-4B8D-8AAB-FFE12DB95A02}" type="datetime1">
               <a:rPr lang="zh-TW" altLang="en-US" smtClean="0"/>
-              <a:t>2026/9/5</a:t>
+              <a:t>2026/9/14</a:t>
             </a:fld>
             <a:endParaRPr lang="zh-TW" altLang="en-US"/>
           </a:p>
@@ -8756,7 +8772,7 @@
           <a:p>
             <a:fld id="{F6207C1D-2BAD-47FF-8692-8390F4A32171}" type="datetime1">
               <a:rPr lang="zh-TW" altLang="en-US" smtClean="0"/>
-              <a:t>2026/9/5</a:t>
+              <a:t>2026/9/14</a:t>
             </a:fld>
             <a:endParaRPr lang="zh-TW" altLang="en-US"/>
           </a:p>
@@ -8881,7 +8897,7 @@
           <a:p>
             <a:fld id="{7FF130CC-13BF-4556-B1CC-E41F47AA4FDE}" type="datetime1">
               <a:rPr lang="zh-TW" altLang="en-US" smtClean="0"/>
-              <a:t>2026/9/5</a:t>
+              <a:t>2026/9/14</a:t>
             </a:fld>
             <a:endParaRPr lang="zh-TW" altLang="en-US"/>
           </a:p>
@@ -9094,7 +9110,7 @@
           <a:p>
             <a:fld id="{10354FD9-B00D-48FF-85D9-3561B9EC258A}" type="datetime1">
               <a:rPr lang="zh-TW" altLang="en-US" smtClean="0"/>
-              <a:t>2026/9/5</a:t>
+              <a:t>2026/9/14</a:t>
             </a:fld>
             <a:endParaRPr lang="zh-TW" altLang="en-US"/>
           </a:p>
@@ -9186,7 +9202,7 @@
           <p:cNvPr id="7" name="圖片 6" descr="一張含有 燈泡 的圖片&#10;&#10;AI 產生的內容可能不正確。">
             <a:extLst>
               <a:ext uri="{FF2B5EF4-FFF2-40B4-BE49-F238E27FC236}">
-                <a16:creationId xmlns:a16="http://schemas.microsoft.com/office/drawing/2014/main" id="{964116FB-86BB-9EDE-0671-C50A7DC09B5A}"/>
+                <a16:creationId xmlns:a16="http://schemas.microsoft.com/office/drawing/2014/main" xmlns="" id="{964116FB-86BB-9EDE-0671-C50A7DC09B5A}"/>
               </a:ext>
             </a:extLst>
           </p:cNvPr>
@@ -9929,7 +9945,7 @@
           <p:cNvPr id="8" name="图示 4">
             <a:extLst>
               <a:ext uri="{FF2B5EF4-FFF2-40B4-BE49-F238E27FC236}">
-                <a16:creationId xmlns:a16="http://schemas.microsoft.com/office/drawing/2014/main" id="{0B07687A-0B62-B289-5EEE-F6B386385C48}"/>
+                <a16:creationId xmlns:a16="http://schemas.microsoft.com/office/drawing/2014/main" xmlns="" id="{0B07687A-0B62-B289-5EEE-F6B386385C48}"/>
               </a:ext>
             </a:extLst>
           </p:cNvPr>
@@ -9957,7 +9973,7 @@
           <p:cNvPr id="4" name="文字方塊 3">
             <a:extLst>
               <a:ext uri="{FF2B5EF4-FFF2-40B4-BE49-F238E27FC236}">
-                <a16:creationId xmlns:a16="http://schemas.microsoft.com/office/drawing/2014/main" id="{2B9770A0-0D44-3FC9-88EF-7BFE983C9F90}"/>
+                <a16:creationId xmlns:a16="http://schemas.microsoft.com/office/drawing/2014/main" xmlns="" id="{2B9770A0-0D44-3FC9-88EF-7BFE983C9F90}"/>
               </a:ext>
             </a:extLst>
           </p:cNvPr>
@@ -10085,7 +10101,7 @@
           <p:cNvPr id="3" name="表格 2">
             <a:extLst>
               <a:ext uri="{FF2B5EF4-FFF2-40B4-BE49-F238E27FC236}">
-                <a16:creationId xmlns:a16="http://schemas.microsoft.com/office/drawing/2014/main" id="{CC3D3289-E422-198A-044D-A162C383DC12}"/>
+                <a16:creationId xmlns:a16="http://schemas.microsoft.com/office/drawing/2014/main" xmlns="" id="{CC3D3289-E422-198A-044D-A162C383DC12}"/>
               </a:ext>
             </a:extLst>
           </p:cNvPr>
@@ -10095,14 +10111,14 @@
           <p:nvPr>
             <p:extLst>
               <p:ext uri="{D42A27DB-BD31-4B8C-83A1-F6EECF244321}">
-                <p14:modId xmlns:p14="http://schemas.microsoft.com/office/powerpoint/2010/main" val="447432908"/>
+                <p14:modId xmlns:p14="http://schemas.microsoft.com/office/powerpoint/2010/main" val="2983365027"/>
               </p:ext>
             </p:extLst>
           </p:nvPr>
         </p:nvGraphicFramePr>
         <p:xfrm>
-          <a:off x="899592" y="908720"/>
-          <a:ext cx="7488832" cy="5688629"/>
+          <a:off x="971600" y="908720"/>
+          <a:ext cx="7488832" cy="5544752"/>
         </p:xfrm>
         <a:graphic>
           <a:graphicData uri="http://schemas.openxmlformats.org/drawingml/2006/table">
@@ -10114,26 +10130,26 @@
                 <a:gridCol w="1248139">
                   <a:extLst>
                     <a:ext uri="{9D8B030D-6E8A-4147-A177-3AD203B41FA5}">
-                      <a16:colId xmlns:a16="http://schemas.microsoft.com/office/drawing/2014/main" val="271123377"/>
+                      <a16:colId xmlns:a16="http://schemas.microsoft.com/office/drawing/2014/main" xmlns="" val="271123377"/>
                     </a:ext>
                   </a:extLst>
                 </a:gridCol>
                 <a:gridCol w="4243672">
                   <a:extLst>
                     <a:ext uri="{9D8B030D-6E8A-4147-A177-3AD203B41FA5}">
-                      <a16:colId xmlns:a16="http://schemas.microsoft.com/office/drawing/2014/main" val="3280078275"/>
+                      <a16:colId xmlns:a16="http://schemas.microsoft.com/office/drawing/2014/main" xmlns="" val="3280078275"/>
                     </a:ext>
                   </a:extLst>
                 </a:gridCol>
                 <a:gridCol w="1997021">
                   <a:extLst>
                     <a:ext uri="{9D8B030D-6E8A-4147-A177-3AD203B41FA5}">
-                      <a16:colId xmlns:a16="http://schemas.microsoft.com/office/drawing/2014/main" val="88816265"/>
+                      <a16:colId xmlns:a16="http://schemas.microsoft.com/office/drawing/2014/main" xmlns="" val="88816265"/>
                     </a:ext>
                   </a:extLst>
                 </a:gridCol>
               </a:tblGrid>
-              <a:tr h="352829">
+              <a:tr h="326633">
                 <a:tc>
                   <a:txBody>
                     <a:bodyPr/>
@@ -10223,11 +10239,11 @@
                 </a:tc>
                 <a:extLst>
                   <a:ext uri="{0D108BD9-81ED-4DB2-BD59-A6C34878D82A}">
-                    <a16:rowId xmlns:a16="http://schemas.microsoft.com/office/drawing/2014/main" val="3574729391"/>
+                    <a16:rowId xmlns:a16="http://schemas.microsoft.com/office/drawing/2014/main" xmlns="" val="3574729391"/>
                   </a:ext>
                 </a:extLst>
               </a:tr>
-              <a:tr h="355720">
+              <a:tr h="326633">
                 <a:tc>
                   <a:txBody>
                     <a:bodyPr/>
@@ -10349,11 +10365,11 @@
                 </a:tc>
                 <a:extLst>
                   <a:ext uri="{0D108BD9-81ED-4DB2-BD59-A6C34878D82A}">
-                    <a16:rowId xmlns:a16="http://schemas.microsoft.com/office/drawing/2014/main" val="337033539"/>
+                    <a16:rowId xmlns:a16="http://schemas.microsoft.com/office/drawing/2014/main" xmlns="" val="337033539"/>
                   </a:ext>
                 </a:extLst>
               </a:tr>
-              <a:tr h="355720">
+              <a:tr h="326633">
                 <a:tc>
                   <a:txBody>
                     <a:bodyPr/>
@@ -10475,11 +10491,11 @@
                 </a:tc>
                 <a:extLst>
                   <a:ext uri="{0D108BD9-81ED-4DB2-BD59-A6C34878D82A}">
-                    <a16:rowId xmlns:a16="http://schemas.microsoft.com/office/drawing/2014/main" val="422439125"/>
+                    <a16:rowId xmlns:a16="http://schemas.microsoft.com/office/drawing/2014/main" xmlns="" val="422439125"/>
                   </a:ext>
                 </a:extLst>
               </a:tr>
-              <a:tr h="355720">
+              <a:tr h="326633">
                 <a:tc>
                   <a:txBody>
                     <a:bodyPr/>
@@ -10590,11 +10606,11 @@
                 </a:tc>
                 <a:extLst>
                   <a:ext uri="{0D108BD9-81ED-4DB2-BD59-A6C34878D82A}">
-                    <a16:rowId xmlns:a16="http://schemas.microsoft.com/office/drawing/2014/main" val="1715377003"/>
+                    <a16:rowId xmlns:a16="http://schemas.microsoft.com/office/drawing/2014/main" xmlns="" val="1715377003"/>
                   </a:ext>
                 </a:extLst>
               </a:tr>
-              <a:tr h="355720">
+              <a:tr h="326633">
                 <a:tc>
                   <a:txBody>
                     <a:bodyPr/>
@@ -10716,11 +10732,11 @@
                 </a:tc>
                 <a:extLst>
                   <a:ext uri="{0D108BD9-81ED-4DB2-BD59-A6C34878D82A}">
-                    <a16:rowId xmlns:a16="http://schemas.microsoft.com/office/drawing/2014/main" val="1318035176"/>
+                    <a16:rowId xmlns:a16="http://schemas.microsoft.com/office/drawing/2014/main" xmlns="" val="1318035176"/>
                   </a:ext>
                 </a:extLst>
               </a:tr>
-              <a:tr h="355720">
+              <a:tr h="326633">
                 <a:tc>
                   <a:txBody>
                     <a:bodyPr/>
@@ -10831,11 +10847,11 @@
                 </a:tc>
                 <a:extLst>
                   <a:ext uri="{0D108BD9-81ED-4DB2-BD59-A6C34878D82A}">
-                    <a16:rowId xmlns:a16="http://schemas.microsoft.com/office/drawing/2014/main" val="1265961963"/>
+                    <a16:rowId xmlns:a16="http://schemas.microsoft.com/office/drawing/2014/main" xmlns="" val="1265961963"/>
                   </a:ext>
                 </a:extLst>
               </a:tr>
-              <a:tr h="355720">
+              <a:tr h="326633">
                 <a:tc>
                   <a:txBody>
                     <a:bodyPr/>
@@ -10925,11 +10941,11 @@
                 </a:tc>
                 <a:extLst>
                   <a:ext uri="{0D108BD9-81ED-4DB2-BD59-A6C34878D82A}">
-                    <a16:rowId xmlns:a16="http://schemas.microsoft.com/office/drawing/2014/main" val="78304438"/>
+                    <a16:rowId xmlns:a16="http://schemas.microsoft.com/office/drawing/2014/main" xmlns="" val="78304438"/>
                   </a:ext>
                 </a:extLst>
               </a:tr>
-              <a:tr h="355720">
+              <a:tr h="326633">
                 <a:tc>
                   <a:txBody>
                     <a:bodyPr/>
@@ -11019,11 +11035,11 @@
                 </a:tc>
                 <a:extLst>
                   <a:ext uri="{0D108BD9-81ED-4DB2-BD59-A6C34878D82A}">
-                    <a16:rowId xmlns:a16="http://schemas.microsoft.com/office/drawing/2014/main" val="3274858139"/>
+                    <a16:rowId xmlns:a16="http://schemas.microsoft.com/office/drawing/2014/main" xmlns="" val="3274858139"/>
                   </a:ext>
                 </a:extLst>
               </a:tr>
-              <a:tr h="355720">
+              <a:tr h="326633">
                 <a:tc>
                   <a:txBody>
                     <a:bodyPr/>
@@ -11137,11 +11153,11 @@
                 </a:tc>
                 <a:extLst>
                   <a:ext uri="{0D108BD9-81ED-4DB2-BD59-A6C34878D82A}">
-                    <a16:rowId xmlns:a16="http://schemas.microsoft.com/office/drawing/2014/main" val="2155096614"/>
+                    <a16:rowId xmlns:a16="http://schemas.microsoft.com/office/drawing/2014/main" xmlns="" val="2155096614"/>
                   </a:ext>
                 </a:extLst>
               </a:tr>
-              <a:tr h="355720">
+              <a:tr h="326633">
                 <a:tc>
                   <a:txBody>
                     <a:bodyPr/>
@@ -11255,11 +11271,11 @@
                 </a:tc>
                 <a:extLst>
                   <a:ext uri="{0D108BD9-81ED-4DB2-BD59-A6C34878D82A}">
-                    <a16:rowId xmlns:a16="http://schemas.microsoft.com/office/drawing/2014/main" val="875398481"/>
+                    <a16:rowId xmlns:a16="http://schemas.microsoft.com/office/drawing/2014/main" xmlns="" val="875398481"/>
                   </a:ext>
                 </a:extLst>
               </a:tr>
-              <a:tr h="355720">
+              <a:tr h="326633">
                 <a:tc>
                   <a:txBody>
                     <a:bodyPr/>
@@ -11349,11 +11365,11 @@
                 </a:tc>
                 <a:extLst>
                   <a:ext uri="{0D108BD9-81ED-4DB2-BD59-A6C34878D82A}">
-                    <a16:rowId xmlns:a16="http://schemas.microsoft.com/office/drawing/2014/main" val="142799672"/>
+                    <a16:rowId xmlns:a16="http://schemas.microsoft.com/office/drawing/2014/main" xmlns="" val="142799672"/>
                   </a:ext>
                 </a:extLst>
               </a:tr>
-              <a:tr h="355720">
+              <a:tr h="326633">
                 <a:tc>
                   <a:txBody>
                     <a:bodyPr/>
@@ -11467,11 +11483,11 @@
                 </a:tc>
                 <a:extLst>
                   <a:ext uri="{0D108BD9-81ED-4DB2-BD59-A6C34878D82A}">
-                    <a16:rowId xmlns:a16="http://schemas.microsoft.com/office/drawing/2014/main" val="2929371313"/>
+                    <a16:rowId xmlns:a16="http://schemas.microsoft.com/office/drawing/2014/main" xmlns="" val="2929371313"/>
                   </a:ext>
                 </a:extLst>
               </a:tr>
-              <a:tr h="355720">
+              <a:tr h="326633">
                 <a:tc>
                   <a:txBody>
                     <a:bodyPr/>
@@ -11585,11 +11601,11 @@
                 </a:tc>
                 <a:extLst>
                   <a:ext uri="{0D108BD9-81ED-4DB2-BD59-A6C34878D82A}">
-                    <a16:rowId xmlns:a16="http://schemas.microsoft.com/office/drawing/2014/main" val="1570592137"/>
+                    <a16:rowId xmlns:a16="http://schemas.microsoft.com/office/drawing/2014/main" xmlns="" val="1570592137"/>
                   </a:ext>
                 </a:extLst>
               </a:tr>
-              <a:tr h="355720">
+              <a:tr h="326633">
                 <a:tc>
                   <a:txBody>
                     <a:bodyPr/>
@@ -11679,11 +11695,11 @@
                 </a:tc>
                 <a:extLst>
                   <a:ext uri="{0D108BD9-81ED-4DB2-BD59-A6C34878D82A}">
-                    <a16:rowId xmlns:a16="http://schemas.microsoft.com/office/drawing/2014/main" val="4232615740"/>
+                    <a16:rowId xmlns:a16="http://schemas.microsoft.com/office/drawing/2014/main" xmlns="" val="4232615740"/>
                   </a:ext>
                 </a:extLst>
               </a:tr>
-              <a:tr h="355720">
+              <a:tr h="326633">
                 <a:tc>
                   <a:txBody>
                     <a:bodyPr/>
@@ -11781,11 +11797,11 @@
                 </a:tc>
                 <a:extLst>
                   <a:ext uri="{0D108BD9-81ED-4DB2-BD59-A6C34878D82A}">
-                    <a16:rowId xmlns:a16="http://schemas.microsoft.com/office/drawing/2014/main" val="1204773125"/>
+                    <a16:rowId xmlns:a16="http://schemas.microsoft.com/office/drawing/2014/main" xmlns="" val="1204773125"/>
                   </a:ext>
                 </a:extLst>
               </a:tr>
-              <a:tr h="355720">
+              <a:tr h="326633">
                 <a:tc>
                   <a:txBody>
                     <a:bodyPr/>
@@ -11883,7 +11899,7 @@
                 </a:tc>
                 <a:extLst>
                   <a:ext uri="{0D108BD9-81ED-4DB2-BD59-A6C34878D82A}">
-                    <a16:rowId xmlns:a16="http://schemas.microsoft.com/office/drawing/2014/main" val="2832463172"/>
+                    <a16:rowId xmlns:a16="http://schemas.microsoft.com/office/drawing/2014/main" xmlns="" val="2832463172"/>
                   </a:ext>
                 </a:extLst>
               </a:tr>
@@ -11891,6 +11907,60 @@
           </a:graphicData>
         </a:graphic>
       </p:graphicFrame>
+      <p:pic>
+        <p:nvPicPr>
+          <p:cNvPr id="1026" name="Picture 2"/>
+          <p:cNvPicPr>
+            <a:picLocks noChangeAspect="1" noChangeArrowheads="1"/>
+          </p:cNvPicPr>
+          <p:nvPr/>
+        </p:nvPicPr>
+        <p:blipFill>
+          <a:blip r:embed="rId3" cstate="email">
+            <a:extLst>
+              <a:ext uri="{28A0092B-C50C-407E-A947-70E740481C1C}">
+                <a14:useLocalDpi xmlns:a14="http://schemas.microsoft.com/office/drawing/2010/main" val="0"/>
+              </a:ext>
+            </a:extLst>
+          </a:blip>
+          <a:srcRect/>
+          <a:stretch>
+            <a:fillRect/>
+          </a:stretch>
+        </p:blipFill>
+        <p:spPr bwMode="auto">
+          <a:xfrm>
+            <a:off x="971600" y="836712"/>
+            <a:ext cx="7522716" cy="5688632"/>
+          </a:xfrm>
+          <a:prstGeom prst="rect">
+            <a:avLst/>
+          </a:prstGeom>
+          <a:noFill/>
+          <a:ln>
+            <a:noFill/>
+          </a:ln>
+          <a:extLst>
+            <a:ext uri="{909E8E84-426E-40DD-AFC4-6F175D3DCCD1}">
+              <a14:hiddenFill xmlns:a14="http://schemas.microsoft.com/office/drawing/2010/main">
+                <a:solidFill>
+                  <a:schemeClr val="accent1"/>
+                </a:solidFill>
+              </a14:hiddenFill>
+            </a:ext>
+            <a:ext uri="{91240B29-F687-4F45-9708-019B960494DF}">
+              <a14:hiddenLine xmlns:a14="http://schemas.microsoft.com/office/drawing/2010/main" w="9525">
+                <a:solidFill>
+                  <a:schemeClr val="tx1"/>
+                </a:solidFill>
+                <a:miter lim="800000"/>
+                <a:headEnd/>
+                <a:tailEnd/>
+              </a14:hiddenLine>
+            </a:ext>
+          </a:extLst>
+        </p:spPr>
+      </p:pic>
     </p:spTree>
     <p:extLst>
       <p:ext uri="{BB962C8B-B14F-4D97-AF65-F5344CB8AC3E}">
@@ -11971,7 +12041,7 @@
           <p:cNvPr id="7" name="文字方塊 6">
             <a:extLst>
               <a:ext uri="{FF2B5EF4-FFF2-40B4-BE49-F238E27FC236}">
-                <a16:creationId xmlns:a16="http://schemas.microsoft.com/office/drawing/2014/main" id="{D59AA06F-E62F-95A9-B710-C966953BE702}"/>
+                <a16:creationId xmlns:a16="http://schemas.microsoft.com/office/drawing/2014/main" xmlns="" id="{D59AA06F-E62F-95A9-B710-C966953BE702}"/>
               </a:ext>
             </a:extLst>
           </p:cNvPr>
@@ -12340,7 +12410,7 @@
           <p:cNvPr id="10" name="文字方塊 9">
             <a:extLst>
               <a:ext uri="{FF2B5EF4-FFF2-40B4-BE49-F238E27FC236}">
-                <a16:creationId xmlns:a16="http://schemas.microsoft.com/office/drawing/2014/main" id="{59635B28-7EAB-F298-0D48-0B63A8612EA5}"/>
+                <a16:creationId xmlns:a16="http://schemas.microsoft.com/office/drawing/2014/main" xmlns="" id="{59635B28-7EAB-F298-0D48-0B63A8612EA5}"/>
               </a:ext>
             </a:extLst>
           </p:cNvPr>
@@ -12592,7 +12662,7 @@
           <p:cNvPr id="11" name="文字方塊 10">
             <a:extLst>
               <a:ext uri="{FF2B5EF4-FFF2-40B4-BE49-F238E27FC236}">
-                <a16:creationId xmlns:a16="http://schemas.microsoft.com/office/drawing/2014/main" id="{2AD0C5C6-39A0-06A2-5583-217D78B5C4A8}"/>
+                <a16:creationId xmlns:a16="http://schemas.microsoft.com/office/drawing/2014/main" xmlns="" id="{2AD0C5C6-39A0-06A2-5583-217D78B5C4A8}"/>
               </a:ext>
             </a:extLst>
           </p:cNvPr>
@@ -12724,7 +12794,7 @@
         <p:cNvPr id="1" name="">
           <a:extLst>
             <a:ext uri="{FF2B5EF4-FFF2-40B4-BE49-F238E27FC236}">
-              <a16:creationId xmlns:a16="http://schemas.microsoft.com/office/drawing/2014/main" id="{D04068F4-2D17-2B5C-C115-9680DC00E186}"/>
+              <a16:creationId xmlns:a16="http://schemas.microsoft.com/office/drawing/2014/main" xmlns="" id="{D04068F4-2D17-2B5C-C115-9680DC00E186}"/>
             </a:ext>
           </a:extLst>
         </p:cNvPr>
@@ -12744,7 +12814,7 @@
           <p:cNvPr id="2" name="標題 1">
             <a:extLst>
               <a:ext uri="{FF2B5EF4-FFF2-40B4-BE49-F238E27FC236}">
-                <a16:creationId xmlns:a16="http://schemas.microsoft.com/office/drawing/2014/main" id="{B76B43A9-8EB7-EB65-71D4-7CA3440F9E13}"/>
+                <a16:creationId xmlns:a16="http://schemas.microsoft.com/office/drawing/2014/main" xmlns="" id="{B76B43A9-8EB7-EB65-71D4-7CA3440F9E13}"/>
               </a:ext>
             </a:extLst>
           </p:cNvPr>
@@ -12772,7 +12842,7 @@
           <p:cNvPr id="4" name="投影片編號版面配置區 3">
             <a:extLst>
               <a:ext uri="{FF2B5EF4-FFF2-40B4-BE49-F238E27FC236}">
-                <a16:creationId xmlns:a16="http://schemas.microsoft.com/office/drawing/2014/main" id="{B1C760BC-2805-F043-8570-4DB492B3A440}"/>
+                <a16:creationId xmlns:a16="http://schemas.microsoft.com/office/drawing/2014/main" xmlns="" id="{B1C760BC-2805-F043-8570-4DB492B3A440}"/>
               </a:ext>
             </a:extLst>
           </p:cNvPr>
@@ -12801,7 +12871,7 @@
           <p:cNvPr id="5" name="圖片 4">
             <a:extLst>
               <a:ext uri="{FF2B5EF4-FFF2-40B4-BE49-F238E27FC236}">
-                <a16:creationId xmlns:a16="http://schemas.microsoft.com/office/drawing/2014/main" id="{AA096FBE-C941-B835-F7AA-46F72526C5CA}"/>
+                <a16:creationId xmlns:a16="http://schemas.microsoft.com/office/drawing/2014/main" xmlns="" id="{AA096FBE-C941-B835-F7AA-46F72526C5CA}"/>
               </a:ext>
             </a:extLst>
           </p:cNvPr>
@@ -12846,7 +12916,7 @@
           <p:cNvPr id="6" name="文字方塊 5">
             <a:extLst>
               <a:ext uri="{FF2B5EF4-FFF2-40B4-BE49-F238E27FC236}">
-                <a16:creationId xmlns:a16="http://schemas.microsoft.com/office/drawing/2014/main" id="{2346AC44-9733-C67F-2CFA-04A45DDE249A}"/>
+                <a16:creationId xmlns:a16="http://schemas.microsoft.com/office/drawing/2014/main" xmlns="" id="{2346AC44-9733-C67F-2CFA-04A45DDE249A}"/>
               </a:ext>
             </a:extLst>
           </p:cNvPr>
@@ -13182,7 +13252,7 @@
           <p:cNvPr id="8" name="文字方塊 7">
             <a:extLst>
               <a:ext uri="{FF2B5EF4-FFF2-40B4-BE49-F238E27FC236}">
-                <a16:creationId xmlns:a16="http://schemas.microsoft.com/office/drawing/2014/main" id="{AF10664E-182A-B186-D047-37014E40FC98}"/>
+                <a16:creationId xmlns:a16="http://schemas.microsoft.com/office/drawing/2014/main" xmlns="" id="{AF10664E-182A-B186-D047-37014E40FC98}"/>
               </a:ext>
             </a:extLst>
           </p:cNvPr>
@@ -13312,7 +13382,7 @@
           <p:cNvPr id="5" name="文字方塊 4">
             <a:extLst>
               <a:ext uri="{FF2B5EF4-FFF2-40B4-BE49-F238E27FC236}">
-                <a16:creationId xmlns:a16="http://schemas.microsoft.com/office/drawing/2014/main" id="{47C71CFB-6A38-716D-C7E4-04AFF7178C61}"/>
+                <a16:creationId xmlns:a16="http://schemas.microsoft.com/office/drawing/2014/main" xmlns="" id="{47C71CFB-6A38-716D-C7E4-04AFF7178C61}"/>
               </a:ext>
             </a:extLst>
           </p:cNvPr>
@@ -13575,28 +13645,28 @@
                 <a:gridCol w="1440161">
                   <a:extLst>
                     <a:ext uri="{9D8B030D-6E8A-4147-A177-3AD203B41FA5}">
-                      <a16:colId xmlns:a16="http://schemas.microsoft.com/office/drawing/2014/main" val="20000"/>
+                      <a16:colId xmlns:a16="http://schemas.microsoft.com/office/drawing/2014/main" xmlns="" val="20000"/>
                     </a:ext>
                   </a:extLst>
                 </a:gridCol>
                 <a:gridCol w="1296144">
                   <a:extLst>
                     <a:ext uri="{9D8B030D-6E8A-4147-A177-3AD203B41FA5}">
-                      <a16:colId xmlns:a16="http://schemas.microsoft.com/office/drawing/2014/main" val="20001"/>
+                      <a16:colId xmlns:a16="http://schemas.microsoft.com/office/drawing/2014/main" xmlns="" val="20001"/>
                     </a:ext>
                   </a:extLst>
                 </a:gridCol>
                 <a:gridCol w="2340260">
                   <a:extLst>
                     <a:ext uri="{9D8B030D-6E8A-4147-A177-3AD203B41FA5}">
-                      <a16:colId xmlns:a16="http://schemas.microsoft.com/office/drawing/2014/main" val="20002"/>
+                      <a16:colId xmlns:a16="http://schemas.microsoft.com/office/drawing/2014/main" xmlns="" val="20002"/>
                     </a:ext>
                   </a:extLst>
                 </a:gridCol>
                 <a:gridCol w="2340260">
                   <a:extLst>
                     <a:ext uri="{9D8B030D-6E8A-4147-A177-3AD203B41FA5}">
-                      <a16:colId xmlns:a16="http://schemas.microsoft.com/office/drawing/2014/main" val="20003"/>
+                      <a16:colId xmlns:a16="http://schemas.microsoft.com/office/drawing/2014/main" xmlns="" val="20003"/>
                     </a:ext>
                   </a:extLst>
                 </a:gridCol>
@@ -13665,7 +13735,7 @@
                 </a:tc>
                 <a:extLst>
                   <a:ext uri="{0D108BD9-81ED-4DB2-BD59-A6C34878D82A}">
-                    <a16:rowId xmlns:a16="http://schemas.microsoft.com/office/drawing/2014/main" val="10000"/>
+                    <a16:rowId xmlns:a16="http://schemas.microsoft.com/office/drawing/2014/main" xmlns="" val="10000"/>
                   </a:ext>
                 </a:extLst>
               </a:tr>
@@ -13737,7 +13807,7 @@
                 </a:tc>
                 <a:extLst>
                   <a:ext uri="{0D108BD9-81ED-4DB2-BD59-A6C34878D82A}">
-                    <a16:rowId xmlns:a16="http://schemas.microsoft.com/office/drawing/2014/main" val="10001"/>
+                    <a16:rowId xmlns:a16="http://schemas.microsoft.com/office/drawing/2014/main" xmlns="" val="10001"/>
                   </a:ext>
                 </a:extLst>
               </a:tr>
@@ -13812,7 +13882,7 @@
                 </a:tc>
                 <a:extLst>
                   <a:ext uri="{0D108BD9-81ED-4DB2-BD59-A6C34878D82A}">
-                    <a16:rowId xmlns:a16="http://schemas.microsoft.com/office/drawing/2014/main" val="10002"/>
+                    <a16:rowId xmlns:a16="http://schemas.microsoft.com/office/drawing/2014/main" xmlns="" val="10002"/>
                   </a:ext>
                 </a:extLst>
               </a:tr>
@@ -14042,7 +14112,7 @@
                 </a:tc>
                 <a:extLst>
                   <a:ext uri="{0D108BD9-81ED-4DB2-BD59-A6C34878D82A}">
-                    <a16:rowId xmlns:a16="http://schemas.microsoft.com/office/drawing/2014/main" val="10003"/>
+                    <a16:rowId xmlns:a16="http://schemas.microsoft.com/office/drawing/2014/main" xmlns="" val="10003"/>
                   </a:ext>
                 </a:extLst>
               </a:tr>
@@ -14071,7 +14141,7 @@
         <p:cNvPr id="1" name="">
           <a:extLst>
             <a:ext uri="{FF2B5EF4-FFF2-40B4-BE49-F238E27FC236}">
-              <a16:creationId xmlns:a16="http://schemas.microsoft.com/office/drawing/2014/main" id="{9985170E-69A4-B167-BC9C-A24957BB0F59}"/>
+              <a16:creationId xmlns:a16="http://schemas.microsoft.com/office/drawing/2014/main" xmlns="" id="{9985170E-69A4-B167-BC9C-A24957BB0F59}"/>
             </a:ext>
           </a:extLst>
         </p:cNvPr>
@@ -14091,7 +14161,7 @@
           <p:cNvPr id="2" name="標題 1">
             <a:extLst>
               <a:ext uri="{FF2B5EF4-FFF2-40B4-BE49-F238E27FC236}">
-                <a16:creationId xmlns:a16="http://schemas.microsoft.com/office/drawing/2014/main" id="{76F86DED-497F-361D-7635-8305D3CD9C51}"/>
+                <a16:creationId xmlns:a16="http://schemas.microsoft.com/office/drawing/2014/main" xmlns="" id="{76F86DED-497F-361D-7635-8305D3CD9C51}"/>
               </a:ext>
             </a:extLst>
           </p:cNvPr>
@@ -14119,7 +14189,7 @@
           <p:cNvPr id="4" name="投影片編號版面配置區 3">
             <a:extLst>
               <a:ext uri="{FF2B5EF4-FFF2-40B4-BE49-F238E27FC236}">
-                <a16:creationId xmlns:a16="http://schemas.microsoft.com/office/drawing/2014/main" id="{890FB45D-59CE-2891-42B3-23888E5F4972}"/>
+                <a16:creationId xmlns:a16="http://schemas.microsoft.com/office/drawing/2014/main" xmlns="" id="{890FB45D-59CE-2891-42B3-23888E5F4972}"/>
               </a:ext>
             </a:extLst>
           </p:cNvPr>
@@ -14148,7 +14218,7 @@
           <p:cNvPr id="5" name="文字方塊 4">
             <a:extLst>
               <a:ext uri="{FF2B5EF4-FFF2-40B4-BE49-F238E27FC236}">
-                <a16:creationId xmlns:a16="http://schemas.microsoft.com/office/drawing/2014/main" id="{0690CAF4-39AC-FEA9-80F6-509ED3DF7632}"/>
+                <a16:creationId xmlns:a16="http://schemas.microsoft.com/office/drawing/2014/main" xmlns="" id="{0690CAF4-39AC-FEA9-80F6-509ED3DF7632}"/>
               </a:ext>
             </a:extLst>
           </p:cNvPr>
